--- a/public/fun/pack/pptx/news/카드뉴스_03_계절안부_교정벚나무.pptx
+++ b/public/fun/pack/pptx/news/카드뉴스_03_계절안부_교정벚나무.pptx
@@ -3348,7 +3348,7 @@
             <a:r>
               <a:rPr sz="3000" b="1" i="0">
                 <a:solidFill>
-                  <a:srgbClr val="9E2E4A"/>
+                  <a:srgbClr val="721D32"/>
                 </a:solidFill>
               </a:rPr>
               <a:t>꽃샘추위에 챙길 겉옷 한 벌</a:t>
@@ -3386,7 +3386,7 @@
             <a:r>
               <a:rPr sz="1500" b="0" i="1">
                 <a:solidFill>
-                  <a:srgbClr val="9E2E4A"/>
+                  <a:srgbClr val="721D32"/>
                 </a:solidFill>
               </a:rPr>
               <a:t>옆으로 넘겨 보세요 →</a:t>
@@ -3446,7 +3446,7 @@
     <p:bg>
       <p:bgPr>
         <a:solidFill>
-          <a:srgbClr val="D1617D"/>
+          <a:srgbClr val="DB3D65"/>
         </a:solidFill>
         <a:effectLst/>
       </p:bgPr>
@@ -3519,7 +3519,7 @@
             <a:r>
               <a:rPr sz="2600" b="1" i="0">
                 <a:solidFill>
-                  <a:srgbClr val="9E2E4A"/>
+                  <a:srgbClr val="721D32"/>
                 </a:solidFill>
               </a:rPr>
               <a:t>겉옷 한 벌 챙기세요</a:t>
@@ -3557,7 +3557,7 @@
             <a:r>
               <a:rPr sz="6600" b="1" i="0">
                 <a:solidFill>
-                  <a:srgbClr val="D1617D"/>
+                  <a:srgbClr val="DB3D65"/>
                 </a:solidFill>
               </a:rPr>
               <a:t>01</a:t>
@@ -3655,7 +3655,7 @@
     <p:bg>
       <p:bgPr>
         <a:solidFill>
-          <a:srgbClr val="D1617D"/>
+          <a:srgbClr val="DB3D65"/>
         </a:solidFill>
         <a:effectLst/>
       </p:bgPr>
@@ -3728,7 +3728,7 @@
             <a:r>
               <a:rPr sz="2600" b="1" i="0">
                 <a:solidFill>
-                  <a:srgbClr val="9E2E4A"/>
+                  <a:srgbClr val="721D32"/>
                 </a:solidFill>
               </a:rPr>
               <a:t>계절 인사 한 줄 보내기</a:t>
@@ -3766,7 +3766,7 @@
             <a:r>
               <a:rPr sz="6600" b="1" i="0">
                 <a:solidFill>
-                  <a:srgbClr val="D1617D"/>
+                  <a:srgbClr val="DB3D65"/>
                 </a:solidFill>
               </a:rPr>
               <a:t>02</a:t>
@@ -3864,7 +3864,7 @@
     <p:bg>
       <p:bgPr>
         <a:solidFill>
-          <a:srgbClr val="D1617D"/>
+          <a:srgbClr val="DB3D65"/>
         </a:solidFill>
         <a:effectLst/>
       </p:bgPr>
@@ -3937,7 +3937,7 @@
             <a:r>
               <a:rPr sz="2600" b="1" i="0">
                 <a:solidFill>
-                  <a:srgbClr val="9E2E4A"/>
+                  <a:srgbClr val="721D32"/>
                 </a:solidFill>
               </a:rPr>
               <a:t>제철 음식으로 기운 채우기</a:t>
@@ -3975,7 +3975,7 @@
             <a:r>
               <a:rPr sz="6600" b="1" i="0">
                 <a:solidFill>
-                  <a:srgbClr val="D1617D"/>
+                  <a:srgbClr val="DB3D65"/>
                 </a:solidFill>
               </a:rPr>
               <a:t>03</a:t>
@@ -4073,7 +4073,7 @@
     <p:bg>
       <p:bgPr>
         <a:solidFill>
-          <a:srgbClr val="D1617D"/>
+          <a:srgbClr val="DB3D65"/>
         </a:solidFill>
         <a:effectLst/>
       </p:bgPr>
@@ -4146,7 +4146,7 @@
             <a:r>
               <a:rPr sz="2600" b="1" i="0">
                 <a:solidFill>
-                  <a:srgbClr val="9E2E4A"/>
+                  <a:srgbClr val="721D32"/>
                 </a:solidFill>
               </a:rPr>
               <a:t>창문 열고 환기하기</a:t>
@@ -4184,7 +4184,7 @@
             <a:r>
               <a:rPr sz="6600" b="1" i="0">
                 <a:solidFill>
-                  <a:srgbClr val="D1617D"/>
+                  <a:srgbClr val="DB3D65"/>
                 </a:solidFill>
               </a:rPr>
               <a:t>04</a:t>
@@ -4282,7 +4282,7 @@
     <p:bg>
       <p:bgPr>
         <a:solidFill>
-          <a:srgbClr val="D1617D"/>
+          <a:srgbClr val="DB3D65"/>
         </a:solidFill>
         <a:effectLst/>
       </p:bgPr>
@@ -4355,7 +4355,7 @@
             <a:r>
               <a:rPr sz="2600" b="1" i="0">
                 <a:solidFill>
-                  <a:srgbClr val="9E2E4A"/>
+                  <a:srgbClr val="721D32"/>
                 </a:solidFill>
               </a:rPr>
               <a:t>계절 사진 한 장 남기기</a:t>
@@ -4393,7 +4393,7 @@
             <a:r>
               <a:rPr sz="6600" b="1" i="0">
                 <a:solidFill>
-                  <a:srgbClr val="D1617D"/>
+                  <a:srgbClr val="DB3D65"/>
                 </a:solidFill>
               </a:rPr>
               <a:t>05</a:t>
@@ -4549,7 +4549,7 @@
             <a:r>
               <a:rPr sz="2800" b="1" i="0">
                 <a:solidFill>
-                  <a:srgbClr val="9E2E4A"/>
+                  <a:srgbClr val="721D32"/>
                 </a:solidFill>
               </a:rPr>
               <a:t>저장해 두고 필요할 때 꺼내 보세요</a:t>
@@ -4587,7 +4587,7 @@
             <a:r>
               <a:rPr sz="1500" b="0" i="1">
                 <a:solidFill>
-                  <a:srgbClr val="9E2E4A"/>
+                  <a:srgbClr val="721D32"/>
                 </a:solidFill>
               </a:rPr>
               <a:t>마음에 들면 공유해 주세요</a:t>
@@ -4652,34 +4652,34 @@
         <a:sysClr val="window" lastClr="FFFFFF"/>
       </a:lt1>
       <a:dk2>
-        <a:srgbClr val="9E2E4A"/>
+        <a:srgbClr val="721D32"/>
       </a:dk2>
       <a:lt2>
-        <a:srgbClr val="FAEFF2"/>
+        <a:srgbClr val="FCF3F5"/>
       </a:lt2>
       <a:accent1>
-        <a:srgbClr val="D1617D"/>
+        <a:srgbClr val="DB3D65"/>
       </a:accent1>
       <a:accent2>
-        <a:srgbClr val="3B9151"/>
+        <a:srgbClr val="339941"/>
       </a:accent2>
       <a:accent3>
-        <a:srgbClr val="9E2E4A"/>
+        <a:srgbClr val="721D32"/>
       </a:accent3>
       <a:accent4>
-        <a:srgbClr val="F3CED7"/>
+        <a:srgbClr val="F7D4DD"/>
       </a:accent4>
       <a:accent5>
-        <a:srgbClr val="867967"/>
+        <a:srgbClr val="876B53"/>
       </a:accent5>
       <a:accent6>
-        <a:srgbClr val="C58292"/>
+        <a:srgbClr val="AA7784"/>
       </a:accent6>
       <a:hlink>
-        <a:srgbClr val="D1617D"/>
+        <a:srgbClr val="DB3D65"/>
       </a:hlink>
       <a:folHlink>
-        <a:srgbClr val="9E2E4A"/>
+        <a:srgbClr val="721D32"/>
       </a:folHlink>
     </a:clrScheme>
     <a:fontScheme name="Office">
